--- a/templates/05-brainstorming-template.pptx
+++ b/templates/05-brainstorming-template.pptx
@@ -3558,7 +3558,7 @@
         <p:spPr>
           <a:xfrm>
             <a:off x="457200" y="1207008"/>
-            <a:ext cx="2743200" cy="182880"/>
+            <a:ext cx="11277295" cy="274320"/>
           </a:xfrm>
           <a:prstGeom prst="rect">
             <a:avLst/>
@@ -3574,13 +3574,13 @@
           <a:p>
             <a:pPr algn="l"/>
             <a:r>
-              <a:rPr lang="en-AU" sz="800" b="1" dirty="0">
+              <a:rPr lang="en-AU" sz="1250" b="1" dirty="0">
                 <a:solidFill>
-                  <a:srgbClr val="6B6A66"/>
+                  <a:srgbClr val="184F95"/>
                 </a:solidFill>
                 <a:latin typeface="Aptos"/>
               </a:rPr>
-              <a:t>HOW TO FILL IT IN</a:t>
+              <a:t>Brainstorming — blank template</a:t>
             </a:r>
           </a:p>
         </p:txBody>
@@ -3593,8 +3593,8 @@
         </p:nvSpPr>
         <p:spPr>
           <a:xfrm>
-            <a:off x="457200" y="1408176"/>
-            <a:ext cx="2743200" cy="914400"/>
+            <a:off x="457200" y="6089904"/>
+            <a:ext cx="11277295" cy="347472"/>
           </a:xfrm>
           <a:prstGeom prst="rect">
             <a:avLst/>
@@ -3610,275 +3610,27 @@
           <a:p>
             <a:pPr algn="l"/>
             <a:r>
-              <a:rPr lang="en-AU" sz="950" dirty="0">
-                <a:solidFill>
-                  <a:srgbClr val="0B0B0B"/>
-                </a:solidFill>
-                <a:latin typeface="Aptos"/>
-              </a:rPr>
-              <a:t>Record what can go wrong at each step underneath, not only the path where everything works.</a:t>
-            </a:r>
-          </a:p>
-        </p:txBody>
-      </p:sp>
-      <p:sp>
-        <p:nvSpPr>
-          <p:cNvPr id="31" name="shape31"/>
-          <p:cNvSpPr/>
-          <p:nvPr/>
-        </p:nvSpPr>
-        <p:spPr>
-          <a:xfrm>
-            <a:off x="457200" y="2414016"/>
-            <a:ext cx="2743200" cy="182880"/>
-          </a:xfrm>
-          <a:prstGeom prst="rect">
-            <a:avLst/>
-          </a:prstGeom>
-          <a:noFill/>
-          <a:ln>
-            <a:noFill/>
-          </a:ln>
-        </p:spPr>
-        <p:txBody>
-          <a:bodyPr wrap="square" anchor="b" lIns="0" rIns="0" tIns="27432" bIns="27432"/>
-          <a:lstStyle/>
-          <a:p>
-            <a:pPr algn="l"/>
-            <a:r>
-              <a:rPr lang="en-AU" sz="800" b="1" dirty="0">
+              <a:rPr lang="en-AU" sz="850" dirty="0">
                 <a:solidFill>
                   <a:srgbClr val="6B6A66"/>
                 </a:solidFill>
                 <a:latin typeface="Aptos"/>
               </a:rPr>
-              <a:t>WHAT IT IS FOR</a:t>
-            </a:r>
-          </a:p>
-        </p:txBody>
-      </p:sp>
-      <p:sp>
-        <p:nvSpPr>
-          <p:cNvPr id="32" name="shape32"/>
+              <a:t>Record what can go wrong at each step underneath, not only the path where everything works.</a:t>
+            </a:r>
+          </a:p>
+        </p:txBody>
+      </p:sp>
+      <p:sp>
+        <p:nvSpPr>
+          <p:cNvPr id="31" name="shape31"/>
           <p:cNvSpPr/>
           <p:nvPr/>
         </p:nvSpPr>
         <p:spPr>
           <a:xfrm>
-            <a:off x="457200" y="2615184"/>
-            <a:ext cx="2743200" cy="731520"/>
-          </a:xfrm>
-          <a:prstGeom prst="rect">
-            <a:avLst/>
-          </a:prstGeom>
-          <a:noFill/>
-          <a:ln>
-            <a:noFill/>
-          </a:ln>
-        </p:spPr>
-        <p:txBody>
-          <a:bodyPr wrap="square" anchor="t" lIns="0" rIns="0" tIns="27432" bIns="27432"/>
-          <a:lstStyle/>
-          <a:p>
-            <a:pPr algn="l"/>
-            <a:r>
-              <a:rPr lang="en-AU" sz="950" dirty="0">
-                <a:solidFill>
-                  <a:srgbClr val="0B0B0B"/>
-                </a:solidFill>
-                <a:latin typeface="Aptos"/>
-              </a:rPr>
-              <a:t>Generates a wide field of ideas quickly by separating generation from judgement.</a:t>
-            </a:r>
-          </a:p>
-        </p:txBody>
-      </p:sp>
-      <p:sp>
-        <p:nvSpPr>
-          <p:cNvPr id="33" name="shape33"/>
-          <p:cNvSpPr/>
-          <p:nvPr/>
-        </p:nvSpPr>
-        <p:spPr>
-          <a:xfrm>
-            <a:off x="457200" y="3438144"/>
-            <a:ext cx="2743200" cy="182880"/>
-          </a:xfrm>
-          <a:prstGeom prst="rect">
-            <a:avLst/>
-          </a:prstGeom>
-          <a:noFill/>
-          <a:ln>
-            <a:noFill/>
-          </a:ln>
-        </p:spPr>
-        <p:txBody>
-          <a:bodyPr wrap="square" anchor="b" lIns="0" rIns="0" tIns="27432" bIns="27432"/>
-          <a:lstStyle/>
-          <a:p>
-            <a:pPr algn="l"/>
-            <a:r>
-              <a:rPr lang="en-AU" sz="800" b="1" dirty="0">
-                <a:solidFill>
-                  <a:srgbClr val="6B6A66"/>
-                </a:solidFill>
-                <a:latin typeface="Aptos"/>
-              </a:rPr>
-              <a:t>MOST OFTEN CONFUSED WITH</a:t>
-            </a:r>
-          </a:p>
-        </p:txBody>
-      </p:sp>
-      <p:sp>
-        <p:nvSpPr>
-          <p:cNvPr id="34" name="shape34"/>
-          <p:cNvSpPr/>
-          <p:nvPr/>
-        </p:nvSpPr>
-        <p:spPr>
-          <a:xfrm>
-            <a:off x="457200" y="3639312"/>
-            <a:ext cx="2743200" cy="1737360"/>
-          </a:xfrm>
-          <a:prstGeom prst="rect">
-            <a:avLst/>
-          </a:prstGeom>
-          <a:solidFill>
-            <a:srgbClr val="F7F7F5"/>
-          </a:solidFill>
-          <a:ln>
-            <a:noFill/>
-          </a:ln>
-        </p:spPr>
-        <p:txBody>
-          <a:bodyPr wrap="square" anchor="t" lIns="91440" rIns="91440" tIns="27432" bIns="27432"/>
-          <a:lstStyle/>
-          <a:p>
-            <a:pPr algn="l"/>
-            <a:r>
-              <a:rPr lang="en-AU" sz="900" dirty="0">
-                <a:solidFill>
-                  <a:srgbClr val="0B0B0B"/>
-                </a:solidFill>
-                <a:latin typeface="Aptos"/>
-              </a:rPr>
-              <a:t>Brainstorming diverges; decision analysis and prioritisation converge. If the scenario already has plenty of options and needs to pick one, brainstorming is the wrong tool no matter how collaborative the setting sounds.</a:t>
-            </a:r>
-          </a:p>
-        </p:txBody>
-      </p:sp>
-      <p:sp>
-        <p:nvSpPr>
-          <p:cNvPr id="35" name="shape35"/>
-          <p:cNvSpPr/>
-          <p:nvPr/>
-        </p:nvSpPr>
-        <p:spPr>
-          <a:xfrm>
-            <a:off x="457200" y="3639312"/>
-            <a:ext cx="32004" cy="1737360"/>
-          </a:xfrm>
-          <a:prstGeom prst="rect">
-            <a:avLst/>
-          </a:prstGeom>
-          <a:solidFill>
-            <a:srgbClr val="FAB219"/>
-          </a:solidFill>
-          <a:ln>
-            <a:noFill/>
-          </a:ln>
-        </p:spPr>
-        <p:txBody>
-          <a:bodyPr wrap="square" anchor="ctr" lIns="54864" rIns="54864" tIns="27432" bIns="27432"/>
-          <a:lstStyle/>
-          <a:p>
-            <a:pPr algn="l"/>
-            <a:endParaRPr lang="en-AU" sz="1100"/>
-          </a:p>
-        </p:txBody>
-      </p:sp>
-      <p:sp>
-        <p:nvSpPr>
-          <p:cNvPr id="36" name="shape36"/>
-          <p:cNvSpPr/>
-          <p:nvPr/>
-        </p:nvSpPr>
-        <p:spPr>
-          <a:xfrm>
-            <a:off x="457200" y="5486400"/>
-            <a:ext cx="2743200" cy="502920"/>
-          </a:xfrm>
-          <a:prstGeom prst="rect">
-            <a:avLst/>
-          </a:prstGeom>
-          <a:noFill/>
-          <a:ln>
-            <a:noFill/>
-          </a:ln>
-        </p:spPr>
-        <p:txBody>
-          <a:bodyPr wrap="square" anchor="t" lIns="0" rIns="0" tIns="27432" bIns="27432"/>
-          <a:lstStyle/>
-          <a:p>
-            <a:pPr algn="l"/>
-            <a:r>
-              <a:rPr lang="en-AU" sz="800" dirty="0">
-                <a:solidFill>
-                  <a:srgbClr val="6B6A66"/>
-                </a:solidFill>
-                <a:latin typeface="Aptos"/>
-              </a:rPr>
-              <a:t>Tasks: 4.2 Conduct Elicitation · 6.3 Assess Risks · 7.5 Define Design Options</a:t>
-            </a:r>
-          </a:p>
-        </p:txBody>
-      </p:sp>
-      <p:sp>
-        <p:nvSpPr>
-          <p:cNvPr id="37" name="shape37"/>
-          <p:cNvSpPr/>
-          <p:nvPr/>
-        </p:nvSpPr>
-        <p:spPr>
-          <a:xfrm>
-            <a:off x="3520440" y="1188720"/>
-            <a:ext cx="8214055" cy="237744"/>
-          </a:xfrm>
-          <a:prstGeom prst="rect">
-            <a:avLst/>
-          </a:prstGeom>
-          <a:noFill/>
-          <a:ln>
-            <a:noFill/>
-          </a:ln>
-        </p:spPr>
-        <p:txBody>
-          <a:bodyPr wrap="square" anchor="b" lIns="0" rIns="0" tIns="27432" bIns="27432"/>
-          <a:lstStyle/>
-          <a:p>
-            <a:pPr algn="l"/>
-            <a:r>
-              <a:rPr lang="en-AU" sz="1050" b="1" dirty="0">
-                <a:solidFill>
-                  <a:srgbClr val="184F95"/>
-                </a:solidFill>
-                <a:latin typeface="Aptos"/>
-              </a:rPr>
-              <a:t>Brainstorming — blank template</a:t>
-            </a:r>
-          </a:p>
-        </p:txBody>
-      </p:sp>
-      <p:sp>
-        <p:nvSpPr>
-          <p:cNvPr id="38" name="shape38"/>
-          <p:cNvSpPr/>
-          <p:nvPr/>
-        </p:nvSpPr>
-        <p:spPr>
-          <a:xfrm>
-            <a:off x="3520440" y="1499616"/>
-            <a:ext cx="2603906" cy="1371600"/>
+            <a:off x="457200" y="1700784"/>
+            <a:ext cx="3624986" cy="1371600"/>
           </a:xfrm>
           <a:prstGeom prst="roundRect">
             <a:avLst>
@@ -3925,13 +3677,13 @@
       </p:sp>
       <p:cxnSp>
         <p:nvCxnSpPr>
-          <p:cNvPr id="39" name="conn39"/>
+          <p:cNvPr id="32" name="conn32"/>
           <p:cNvCxnSpPr/>
           <p:nvPr/>
         </p:nvCxnSpPr>
         <p:spPr>
           <a:xfrm>
-            <a:off x="6142634" y="2185416"/>
+            <a:off x="4100474" y="2386584"/>
             <a:ext cx="164592" cy="1"/>
           </a:xfrm>
           <a:prstGeom prst="line">
@@ -3947,14 +3699,14 @@
       </p:cxnSp>
       <p:sp>
         <p:nvSpPr>
-          <p:cNvPr id="40" name="shape40"/>
+          <p:cNvPr id="33" name="shape33"/>
           <p:cNvSpPr/>
           <p:nvPr/>
         </p:nvSpPr>
         <p:spPr>
           <a:xfrm>
-            <a:off x="6325514" y="1499616"/>
-            <a:ext cx="2603906" cy="1371600"/>
+            <a:off x="4283354" y="1700784"/>
+            <a:ext cx="3624986" cy="1371600"/>
           </a:xfrm>
           <a:prstGeom prst="roundRect">
             <a:avLst>
@@ -4001,13 +3753,13 @@
       </p:sp>
       <p:cxnSp>
         <p:nvCxnSpPr>
-          <p:cNvPr id="41" name="conn41"/>
+          <p:cNvPr id="34" name="conn34"/>
           <p:cNvCxnSpPr/>
           <p:nvPr/>
         </p:nvCxnSpPr>
         <p:spPr>
           <a:xfrm>
-            <a:off x="8947709" y="2185416"/>
+            <a:off x="7926629" y="2386584"/>
             <a:ext cx="164592" cy="1"/>
           </a:xfrm>
           <a:prstGeom prst="line">
@@ -4023,14 +3775,14 @@
       </p:cxnSp>
       <p:sp>
         <p:nvSpPr>
-          <p:cNvPr id="42" name="shape42"/>
+          <p:cNvPr id="35" name="shape35"/>
           <p:cNvSpPr/>
           <p:nvPr/>
         </p:nvSpPr>
         <p:spPr>
           <a:xfrm>
-            <a:off x="9130589" y="1499616"/>
-            <a:ext cx="2603906" cy="1371600"/>
+            <a:off x="8109509" y="1700784"/>
+            <a:ext cx="3624986" cy="1371600"/>
           </a:xfrm>
           <a:prstGeom prst="roundRect">
             <a:avLst>
